--- a/reports/weekly/第2週週報_2026-10-12.pptx
+++ b/reports/weekly/第2週週報_2026-10-12.pptx
@@ -23,6 +23,7 @@
     <p:sldId id="271" r:id="rId22"/>
     <p:sldId id="272" r:id="rId23"/>
     <p:sldId id="273" r:id="rId24"/>
+    <p:sldId id="274" r:id="rId25"/>
   </p:sldIdLst>
   <p:sldSz cx="12191695" cy="6858000" type="screen4x3"/>
   <p:notesSz cx="6858000" cy="9144000"/>
@@ -163,9 +164,9 @@
           </c:marker>
           <c:cat>
             <c:strRef>
-              <c:f>Sheet1!$A$2:$A$5</c:f>
+              <c:f>Sheet1!$A$2:$A$6</c:f>
               <c:strCache>
-                <c:ptCount val="4"/>
+                <c:ptCount val="5"/>
                 <c:pt idx="0">
                   <c:v>週一</c:v>
                 </c:pt>
@@ -178,15 +179,18 @@
                 <c:pt idx="3">
                   <c:v>週四</c:v>
                 </c:pt>
+                <c:pt idx="4">
+                  <c:v>週五</c:v>
+                </c:pt>
               </c:strCache>
             </c:strRef>
           </c:cat>
           <c:val>
             <c:numRef>
-              <c:f>Sheet1!$B$2:$B$5</c:f>
+              <c:f>Sheet1!$B$2:$B$6</c:f>
               <c:numCache>
                 <c:formatCode>General</c:formatCode>
-                <c:ptCount val="4"/>
+                <c:ptCount val="5"/>
                 <c:pt idx="0">
                   <c:v>99.41</c:v>
                 </c:pt>
@@ -198,6 +202,9 @@
                 </c:pt>
                 <c:pt idx="3">
                   <c:v>85.99</c:v>
+                </c:pt>
+                <c:pt idx="4">
+                  <c:v>87.49</c:v>
                 </c:pt>
               </c:numCache>
             </c:numRef>
@@ -234,9 +241,9 @@
           </c:marker>
           <c:cat>
             <c:strRef>
-              <c:f>Sheet1!$A$2:$A$5</c:f>
+              <c:f>Sheet1!$A$2:$A$6</c:f>
               <c:strCache>
-                <c:ptCount val="4"/>
+                <c:ptCount val="5"/>
                 <c:pt idx="0">
                   <c:v>週一</c:v>
                 </c:pt>
@@ -249,15 +256,18 @@
                 <c:pt idx="3">
                   <c:v>週四</c:v>
                 </c:pt>
+                <c:pt idx="4">
+                  <c:v>週五</c:v>
+                </c:pt>
               </c:strCache>
             </c:strRef>
           </c:cat>
           <c:val>
             <c:numRef>
-              <c:f>Sheet1!$C$2:$C$5</c:f>
+              <c:f>Sheet1!$C$2:$C$6</c:f>
               <c:numCache>
                 <c:formatCode>General</c:formatCode>
-                <c:ptCount val="4"/>
+                <c:ptCount val="5"/>
                 <c:pt idx="0">
                   <c:v>99.98</c:v>
                 </c:pt>
@@ -269,6 +279,9 @@
                 </c:pt>
                 <c:pt idx="3">
                   <c:v>95.25</c:v>
+                </c:pt>
+                <c:pt idx="4">
+                  <c:v>95.53</c:v>
                 </c:pt>
               </c:numCache>
             </c:numRef>
@@ -402,7 +415,7 @@
             <c:idx val="0"/>
             <c:spPr>
               <a:solidFill>
-                <a:srgbClr val="C8323A"/>
+                <a:srgbClr val="178A55"/>
               </a:solidFill>
             </c:spPr>
           </c:dPt>
@@ -468,25 +481,25 @@
               <c:strCache>
                 <c:ptCount val="8"/>
                 <c:pt idx="0">
-                  <c:v>2889 國票金</c:v>
+                  <c:v>6213 聯茂</c:v>
                 </c:pt>
                 <c:pt idx="1">
                   <c:v>5880 合庫金</c:v>
                 </c:pt>
                 <c:pt idx="2">
-                  <c:v>3591 艾笛森</c:v>
+                  <c:v>3037 欣興</c:v>
                 </c:pt>
                 <c:pt idx="3">
-                  <c:v>3037 欣興</c:v>
+                  <c:v>3591 艾笛森</c:v>
                 </c:pt>
                 <c:pt idx="4">
                   <c:v>6196 帆宣</c:v>
                 </c:pt>
                 <c:pt idx="5">
-                  <c:v>1560 中砂</c:v>
+                  <c:v>3189 景碩</c:v>
                 </c:pt>
                 <c:pt idx="6">
-                  <c:v>3189 景碩</c:v>
+                  <c:v>1560 中砂</c:v>
                 </c:pt>
                 <c:pt idx="7">
                   <c:v>期貨與選擇權</c:v>
@@ -501,28 +514,28 @@
                 <c:formatCode>General</c:formatCode>
                 <c:ptCount val="8"/>
                 <c:pt idx="0">
-                  <c:v>12125</c:v>
+                  <c:v>-34016</c:v>
                 </c:pt>
                 <c:pt idx="1">
-                  <c:v>25200</c:v>
+                  <c:v>40800</c:v>
                 </c:pt>
                 <c:pt idx="2">
-                  <c:v>-50294</c:v>
+                  <c:v>-51300</c:v>
                 </c:pt>
                 <c:pt idx="3">
-                  <c:v>-59850</c:v>
+                  <c:v>-52346</c:v>
                 </c:pt>
                 <c:pt idx="4">
-                  <c:v>-70150</c:v>
+                  <c:v>-74750</c:v>
                 </c:pt>
                 <c:pt idx="5">
-                  <c:v>-113487</c:v>
+                  <c:v>-122925</c:v>
                 </c:pt>
                 <c:pt idx="6">
-                  <c:v>-157344</c:v>
+                  <c:v>-145126</c:v>
                 </c:pt>
                 <c:pt idx="7">
-                  <c:v>-975536</c:v>
+                  <c:v>-834337</c:v>
                 </c:pt>
               </c:numCache>
             </c:numRef>
@@ -3768,7 +3781,7 @@
                 <a:ea typeface="Microsoft JhengHei"/>
                 <a:cs typeface="Microsoft JhengHei"/>
               </a:rPr>
-              <a:t>2026-10-12～2026-10-15</a:t>
+              <a:t>2026-10-12～2026-10-16</a:t>
             </a:r>
           </a:p>
         </p:txBody>
@@ -3809,7 +3822,7 @@
                 <a:ea typeface="Microsoft JhengHei"/>
                 <a:cs typeface="Microsoft JhengHei"/>
               </a:rPr>
-              <a:t>-14.01%</a:t>
+              <a:t>-12.51%</a:t>
             </a:r>
           </a:p>
         </p:txBody>
@@ -3932,7 +3945,7 @@
                 <a:ea typeface="Microsoft JhengHei"/>
                 <a:cs typeface="Microsoft JhengHei"/>
               </a:rPr>
-              <a:t>-4.75%</a:t>
+              <a:t>-4.47%</a:t>
             </a:r>
           </a:p>
         </p:txBody>
@@ -4014,7 +4027,7 @@
                 <a:ea typeface="Microsoft JhengHei"/>
                 <a:cs typeface="Microsoft JhengHei"/>
               </a:rPr>
-              <a:t>-14.19%</a:t>
+              <a:t>-12.69%</a:t>
             </a:r>
           </a:p>
         </p:txBody>
@@ -4096,7 +4109,7 @@
                 <a:ea typeface="Microsoft JhengHei"/>
                 <a:cs typeface="Microsoft JhengHei"/>
               </a:rPr>
-              <a:t>8,580,889</a:t>
+              <a:t>8,730,907</a:t>
             </a:r>
           </a:p>
         </p:txBody>
@@ -4178,7 +4191,7 @@
                 <a:ea typeface="Microsoft JhengHei"/>
                 <a:cs typeface="Microsoft JhengHei"/>
               </a:rPr>
-              <a:t>104.2%</a:t>
+              <a:t>100.4%</a:t>
             </a:r>
           </a:p>
         </p:txBody>
@@ -4301,7 +4314,7 @@
                 <a:ea typeface="Microsoft JhengHei"/>
                 <a:cs typeface="Microsoft JhengHei"/>
               </a:rPr>
-              <a:t>本週虧損14.01%，大盤下跌4.75%，主要因期貨虧損導致持股率超過100%，操作上減碼負面新聞股並布局半導體強勢股。</a:t>
+              <a:t>本週總資產 -12.51%，加權指數 -4.47%，成交 8 筆</a:t>
             </a:r>
           </a:p>
         </p:txBody>
@@ -5152,15 +5165,15 @@
               </a:lnSpc>
             </a:pPr>
             <a:r>
-              <a:rPr sz="1300" b="0">
-                <a:solidFill>
-                  <a:srgbClr val="B8C2D6"/>
-                </a:solidFill>
-                <a:latin typeface="Microsoft JhengHei"/>
-                <a:ea typeface="Microsoft JhengHei"/>
-                <a:cs typeface="Microsoft JhengHei"/>
-              </a:rPr>
-              <a:t>盤中</a:t>
+              <a:rPr sz="1700" b="1">
+                <a:solidFill>
+                  <a:srgbClr val="FF7A80"/>
+                </a:solidFill>
+                <a:latin typeface="Bahnschrift"/>
+                <a:ea typeface="Microsoft JhengHei"/>
+                <a:cs typeface="Microsoft JhengHei"/>
+              </a:rPr>
+              <a:t>+0.30%</a:t>
             </a:r>
           </a:p>
         </p:txBody>
@@ -6072,15 +6085,15 @@
               </a:lnSpc>
             </a:pPr>
             <a:r>
-              <a:rPr sz="1300" b="0">
-                <a:solidFill>
-                  <a:srgbClr val="6B7489"/>
-                </a:solidFill>
-                <a:latin typeface="Microsoft JhengHei"/>
-                <a:ea typeface="Microsoft JhengHei"/>
-                <a:cs typeface="Microsoft JhengHei"/>
-              </a:rPr>
-              <a:t>盤中</a:t>
+              <a:rPr sz="1700" b="1">
+                <a:solidFill>
+                  <a:srgbClr val="C8323A"/>
+                </a:solidFill>
+                <a:latin typeface="Bahnschrift"/>
+                <a:ea typeface="Microsoft JhengHei"/>
+                <a:cs typeface="Microsoft JhengHei"/>
+              </a:rPr>
+              <a:t>+0.30%</a:t>
             </a:r>
           </a:p>
         </p:txBody>
@@ -6343,7 +6356,39 @@
                 <a:ea typeface="Microsoft JhengHei"/>
                 <a:cs typeface="Microsoft JhengHei"/>
               </a:rPr>
-              <a:t>【進攻籃】綜合分數 +0.70 達門檻（+0.30）；一個月模型預期超額報酬排名全市場前 6%、創新高機率 79.5%；一個月模型：創 52 週新高機率 79.5%（全市場基準 18.3%，排名前 9%），預期超額報酬 +8.13%（排名前 6%）；距 52 週高點 -4.7%（52 週高 1060.0，現價 1010.0）。</a:t>
+              <a:t>【進攻籃】綜合分數 +0.70 達門檻（+0.30）；一個月模型預期超額報酬排名全市場前 6%、創新高機率 79.5%；一個月模型：創 52 週新高機率 79.5%（全市場基準 18.3%，排名前 9%），預期超額報酬 +8.13%（排名前 6%）</a:t>
+            </a:r>
+          </a:p>
+          <a:p>
+            <a:pPr algn="l">
+              <a:lnSpc>
+                <a:spcPct val="130000"/>
+              </a:lnSpc>
+              <a:spcAft>
+                <a:spcPts val="600"/>
+              </a:spcAft>
+            </a:pPr>
+            <a:r>
+              <a:rPr sz="700" b="0">
+                <a:solidFill>
+                  <a:srgbClr val="14213D"/>
+                </a:solidFill>
+                <a:latin typeface="Microsoft JhengHei"/>
+                <a:ea typeface="Microsoft JhengHei"/>
+                <a:cs typeface="Microsoft JhengHei"/>
+              </a:rPr>
+              <a:t>■ </a:t>
+            </a:r>
+            <a:r>
+              <a:rPr sz="1200" b="0">
+                <a:solidFill>
+                  <a:srgbClr val="3B4763"/>
+                </a:solidFill>
+                <a:latin typeface="Microsoft JhengHei"/>
+                <a:ea typeface="Microsoft JhengHei"/>
+                <a:cs typeface="Microsoft JhengHei"/>
+              </a:rPr>
+              <a:t>距 52 週高點 -4.7%（52 週高 1060.0，現價 1010.0）</a:t>
             </a:r>
           </a:p>
           <a:p>
@@ -6842,7 +6887,7 @@
                 <a:ea typeface="Microsoft JhengHei"/>
                 <a:cs typeface="Microsoft JhengHei"/>
               </a:rPr>
-              <a:t>2026 德明X富達投資擂台｜第 2 週週報｜2026-10-12～2026-10-15</a:t>
+              <a:t>2026 德明X富達投資擂台｜第 2 週週報｜2026-10-12～2026-10-16</a:t>
             </a:r>
           </a:p>
         </p:txBody>
@@ -7752,15 +7797,15 @@
               </a:lnSpc>
             </a:pPr>
             <a:r>
-              <a:rPr sz="1300" b="0">
-                <a:solidFill>
-                  <a:srgbClr val="6B7489"/>
-                </a:solidFill>
-                <a:latin typeface="Microsoft JhengHei"/>
-                <a:ea typeface="Microsoft JhengHei"/>
-                <a:cs typeface="Microsoft JhengHei"/>
-              </a:rPr>
-              <a:t>盤中</a:t>
+              <a:rPr sz="1700" b="1">
+                <a:solidFill>
+                  <a:srgbClr val="C8323A"/>
+                </a:solidFill>
+                <a:latin typeface="Bahnschrift"/>
+                <a:ea typeface="Microsoft JhengHei"/>
+                <a:cs typeface="Microsoft JhengHei"/>
+              </a:rPr>
+              <a:t>+0.30%</a:t>
             </a:r>
           </a:p>
         </p:txBody>
@@ -7883,7 +7928,7 @@
                 <a:ea typeface="Microsoft JhengHei"/>
                 <a:cs typeface="Microsoft JhengHei"/>
               </a:rPr>
-              <a:t>總資產 8,580,889 元；證券戶現金 41,923 元；期貨戶權益 821,840 元</a:t>
+              <a:t>總資產 8,730,907 元；證券戶現金 41,923 元；期貨戶權益 963,040 元</a:t>
             </a:r>
           </a:p>
         </p:txBody>
@@ -8390,7 +8435,7 @@
                           <a:ea typeface="Microsoft JhengHei"/>
                           <a:cs typeface="Microsoft JhengHei"/>
                         </a:rPr>
-                        <a:t>979</a:t>
+                        <a:t>1,000</a:t>
                       </a:r>
                     </a:p>
                   </a:txBody>
@@ -8427,7 +8472,7 @@
                           <a:ea typeface="Microsoft JhengHei"/>
                           <a:cs typeface="Microsoft JhengHei"/>
                         </a:rPr>
-                        <a:t>-169,969</a:t>
+                        <a:t>-135,550</a:t>
                       </a:r>
                     </a:p>
                   </a:txBody>
@@ -8464,7 +8509,7 @@
                           <a:ea typeface="Microsoft JhengHei"/>
                           <a:cs typeface="Microsoft JhengHei"/>
                         </a:rPr>
-                        <a:t>-9.71%</a:t>
+                        <a:t>-7.77%</a:t>
                       </a:r>
                     </a:p>
                   </a:txBody>
@@ -8501,7 +8546,7 @@
                           <a:ea typeface="Microsoft JhengHei"/>
                           <a:cs typeface="Microsoft JhengHei"/>
                         </a:rPr>
-                        <a:t>18.7%</a:t>
+                        <a:t>18.8%</a:t>
                       </a:r>
                     </a:p>
                   </a:txBody>
@@ -8686,7 +8731,7 @@
                           <a:ea typeface="Microsoft JhengHei"/>
                           <a:cs typeface="Microsoft JhengHei"/>
                         </a:rPr>
-                        <a:t>903</a:t>
+                        <a:t>874</a:t>
                       </a:r>
                     </a:p>
                   </a:txBody>
@@ -8723,7 +8768,7 @@
                           <a:ea typeface="Microsoft JhengHei"/>
                           <a:cs typeface="Microsoft JhengHei"/>
                         </a:rPr>
-                        <a:t>-123,692</a:t>
+                        <a:t>-155,331</a:t>
                       </a:r>
                     </a:p>
                   </a:txBody>
@@ -8760,7 +8805,7 @@
                           <a:ea typeface="Microsoft JhengHei"/>
                           <a:cs typeface="Microsoft JhengHei"/>
                         </a:rPr>
-                        <a:t>-11.28%</a:t>
+                        <a:t>-14.13%</a:t>
                       </a:r>
                     </a:p>
                   </a:txBody>
@@ -8797,7 +8842,7 @@
                           <a:ea typeface="Microsoft JhengHei"/>
                           <a:cs typeface="Microsoft JhengHei"/>
                         </a:rPr>
-                        <a:t>11.5%</a:t>
+                        <a:t>10.9%</a:t>
                       </a:r>
                     </a:p>
                   </a:txBody>
@@ -8982,7 +9027,7 @@
                           <a:ea typeface="Microsoft JhengHei"/>
                           <a:cs typeface="Microsoft JhengHei"/>
                         </a:rPr>
-                        <a:t>799</a:t>
+                        <a:t>774</a:t>
                       </a:r>
                     </a:p>
                   </a:txBody>
@@ -9019,7 +9064,7 @@
                           <a:ea typeface="Microsoft JhengHei"/>
                           <a:cs typeface="Microsoft JhengHei"/>
                         </a:rPr>
-                        <a:t>73,000</a:t>
+                        <a:t>48,000</a:t>
                       </a:r>
                     </a:p>
                   </a:txBody>
@@ -9056,7 +9101,7 @@
                           <a:ea typeface="Microsoft JhengHei"/>
                           <a:cs typeface="Microsoft JhengHei"/>
                         </a:rPr>
-                        <a:t>+9.90%</a:t>
+                        <a:t>+6.46%</a:t>
                       </a:r>
                     </a:p>
                   </a:txBody>
@@ -9093,7 +9138,7 @@
                           <a:ea typeface="Microsoft JhengHei"/>
                           <a:cs typeface="Microsoft JhengHei"/>
                         </a:rPr>
-                        <a:t>9.3%</a:t>
+                        <a:t>8.9%</a:t>
                       </a:r>
                     </a:p>
                   </a:txBody>
@@ -9278,7 +9323,7 @@
                           <a:ea typeface="Microsoft JhengHei"/>
                           <a:cs typeface="Microsoft JhengHei"/>
                         </a:rPr>
-                        <a:t>613</a:t>
+                        <a:t>609</a:t>
                       </a:r>
                     </a:p>
                   </a:txBody>
@@ -9315,7 +9360,7 @@
                           <a:ea typeface="Microsoft JhengHei"/>
                           <a:cs typeface="Microsoft JhengHei"/>
                         </a:rPr>
-                        <a:t>-44,850</a:t>
+                        <a:t>-49,450</a:t>
                       </a:r>
                     </a:p>
                   </a:txBody>
@@ -9352,7 +9397,7 @@
                           <a:ea typeface="Microsoft JhengHei"/>
                           <a:cs typeface="Microsoft JhengHei"/>
                         </a:rPr>
-                        <a:t>-6.12%</a:t>
+                        <a:t>-6.73%</a:t>
                       </a:r>
                     </a:p>
                   </a:txBody>
@@ -9389,7 +9434,7 @@
                           <a:ea typeface="Microsoft JhengHei"/>
                           <a:cs typeface="Microsoft JhengHei"/>
                         </a:rPr>
-                        <a:t>8.2%</a:t>
+                        <a:t>8.0%</a:t>
                       </a:r>
                     </a:p>
                   </a:txBody>
@@ -9574,7 +9619,7 @@
                           <a:ea typeface="Microsoft JhengHei"/>
                           <a:cs typeface="Microsoft JhengHei"/>
                         </a:rPr>
-                        <a:t>16.80</a:t>
+                        <a:t>16.95</a:t>
                       </a:r>
                     </a:p>
                   </a:txBody>
@@ -9611,7 +9656,7 @@
                           <a:ea typeface="Microsoft JhengHei"/>
                           <a:cs typeface="Microsoft JhengHei"/>
                         </a:rPr>
-                        <a:t>31,712</a:t>
+                        <a:t>37,774</a:t>
                       </a:r>
                     </a:p>
                   </a:txBody>
@@ -9648,7 +9693,7 @@
                           <a:ea typeface="Microsoft JhengHei"/>
                           <a:cs typeface="Microsoft JhengHei"/>
                         </a:rPr>
-                        <a:t>+4.74%</a:t>
+                        <a:t>+5.68%</a:t>
                       </a:r>
                     </a:p>
                   </a:txBody>
@@ -9685,7 +9730,7 @@
                           <a:ea typeface="Microsoft JhengHei"/>
                           <a:cs typeface="Microsoft JhengHei"/>
                         </a:rPr>
-                        <a:t>7.9%</a:t>
+                        <a:t>7.8%</a:t>
                       </a:r>
                     </a:p>
                   </a:txBody>
@@ -9870,7 +9915,7 @@
                           <a:ea typeface="Microsoft JhengHei"/>
                           <a:cs typeface="Microsoft JhengHei"/>
                         </a:rPr>
-                        <a:t>27.50</a:t>
+                        <a:t>28.15</a:t>
                       </a:r>
                     </a:p>
                   </a:txBody>
@@ -9907,7 +9952,7 @@
                           <a:ea typeface="Microsoft JhengHei"/>
                           <a:cs typeface="Microsoft JhengHei"/>
                         </a:rPr>
-                        <a:t>33,600</a:t>
+                        <a:t>49,200</a:t>
                       </a:r>
                     </a:p>
                   </a:txBody>
@@ -9944,7 +9989,7 @@
                           <a:ea typeface="Microsoft JhengHei"/>
                           <a:cs typeface="Microsoft JhengHei"/>
                         </a:rPr>
-                        <a:t>+5.21%</a:t>
+                        <a:t>+7.70%</a:t>
                       </a:r>
                     </a:p>
                   </a:txBody>
@@ -10166,7 +10211,7 @@
                           <a:ea typeface="Microsoft JhengHei"/>
                           <a:cs typeface="Microsoft JhengHei"/>
                         </a:rPr>
-                        <a:t>1,075</a:t>
+                        <a:t>1,090</a:t>
                       </a:r>
                     </a:p>
                   </a:txBody>
@@ -10203,7 +10248,7 @@
                           <a:ea typeface="Microsoft JhengHei"/>
                           <a:cs typeface="Microsoft JhengHei"/>
                         </a:rPr>
-                        <a:t>-59,850</a:t>
+                        <a:t>-51,300</a:t>
                       </a:r>
                     </a:p>
                   </a:txBody>
@@ -10240,7 +10285,7 @@
                           <a:ea typeface="Microsoft JhengHei"/>
                           <a:cs typeface="Microsoft JhengHei"/>
                         </a:rPr>
-                        <a:t>-9.03%</a:t>
+                        <a:t>-7.76%</a:t>
                       </a:r>
                     </a:p>
                   </a:txBody>
@@ -10462,7 +10507,7 @@
                           <a:ea typeface="Microsoft JhengHei"/>
                           <a:cs typeface="Microsoft JhengHei"/>
                         </a:rPr>
-                        <a:t>26.65</a:t>
+                        <a:t>26.55</a:t>
                       </a:r>
                     </a:p>
                   </a:txBody>
@@ -10499,7 +10544,7 @@
                           <a:ea typeface="Microsoft JhengHei"/>
                           <a:cs typeface="Microsoft JhengHei"/>
                         </a:rPr>
-                        <a:t>-40,679</a:t>
+                        <a:t>-42,732</a:t>
                       </a:r>
                     </a:p>
                   </a:txBody>
@@ -10536,7 +10581,7 @@
                           <a:ea typeface="Microsoft JhengHei"/>
                           <a:cs typeface="Microsoft JhengHei"/>
                         </a:rPr>
-                        <a:t>-7.05%</a:t>
+                        <a:t>-7.40%</a:t>
                       </a:r>
                     </a:p>
                   </a:txBody>
@@ -10573,7 +10618,7 @@
                           <a:ea typeface="Microsoft JhengHei"/>
                           <a:cs typeface="Microsoft JhengHei"/>
                         </a:rPr>
-                        <a:t>6.4%</a:t>
+                        <a:t>6.2%</a:t>
                       </a:r>
                     </a:p>
                   </a:txBody>
@@ -10758,7 +10803,7 @@
                           <a:ea typeface="Microsoft JhengHei"/>
                           <a:cs typeface="Microsoft JhengHei"/>
                         </a:rPr>
-                        <a:t>13.25</a:t>
+                        <a:t>13.40</a:t>
                       </a:r>
                     </a:p>
                   </a:txBody>
@@ -10795,7 +10840,7 @@
                           <a:ea typeface="Microsoft JhengHei"/>
                           <a:cs typeface="Microsoft JhengHei"/>
                         </a:rPr>
-                        <a:t>10,818</a:t>
+                        <a:t>16,228</a:t>
                       </a:r>
                     </a:p>
                   </a:txBody>
@@ -10832,7 +10877,7 @@
                           <a:ea typeface="Microsoft JhengHei"/>
                           <a:cs typeface="Microsoft JhengHei"/>
                         </a:rPr>
-                        <a:t>+2.17%</a:t>
+                        <a:t>+3.32%</a:t>
                       </a:r>
                     </a:p>
                   </a:txBody>
@@ -10869,7 +10914,7 @@
                           <a:ea typeface="Microsoft JhengHei"/>
                           <a:cs typeface="Microsoft JhengHei"/>
                         </a:rPr>
-                        <a:t>5.6%</a:t>
+                        <a:t>5.5%</a:t>
                       </a:r>
                     </a:p>
                   </a:txBody>
@@ -11054,7 +11099,7 @@
                           <a:ea typeface="Microsoft JhengHei"/>
                           <a:cs typeface="Microsoft JhengHei"/>
                         </a:rPr>
-                        <a:t>58.90</a:t>
+                        <a:t>59</a:t>
                       </a:r>
                     </a:p>
                   </a:txBody>
@@ -11091,7 +11136,7 @@
                           <a:ea typeface="Microsoft JhengHei"/>
                           <a:cs typeface="Microsoft JhengHei"/>
                         </a:rPr>
-                        <a:t>10,360</a:t>
+                        <a:t>11,077</a:t>
                       </a:r>
                     </a:p>
                   </a:txBody>
@@ -11128,7 +11173,7 @@
                           <a:ea typeface="Microsoft JhengHei"/>
                           <a:cs typeface="Microsoft JhengHei"/>
                         </a:rPr>
-                        <a:t>+2.36%</a:t>
+                        <a:t>+2.53%</a:t>
                       </a:r>
                     </a:p>
                   </a:txBody>
@@ -11165,7 +11210,7 @@
                           <a:ea typeface="Microsoft JhengHei"/>
                           <a:cs typeface="Microsoft JhengHei"/>
                         </a:rPr>
-                        <a:t>4.9%</a:t>
+                        <a:t>4.8%</a:t>
                       </a:r>
                     </a:p>
                   </a:txBody>
@@ -11350,7 +11395,7 @@
                           <a:ea typeface="Microsoft JhengHei"/>
                           <a:cs typeface="Microsoft JhengHei"/>
                         </a:rPr>
-                        <a:t>110</a:t>
+                        <a:t>110.50</a:t>
                       </a:r>
                     </a:p>
                   </a:txBody>
@@ -11387,7 +11432,7 @@
                           <a:ea typeface="Microsoft JhengHei"/>
                           <a:cs typeface="Microsoft JhengHei"/>
                         </a:rPr>
-                        <a:t>-5,500</a:t>
+                        <a:t>-5,000</a:t>
                       </a:r>
                     </a:p>
                   </a:txBody>
@@ -11424,7 +11469,7 @@
                           <a:ea typeface="Microsoft JhengHei"/>
                           <a:cs typeface="Microsoft JhengHei"/>
                         </a:rPr>
-                        <a:t>-4.90%</a:t>
+                        <a:t>-4.47%</a:t>
                       </a:r>
                     </a:p>
                   </a:txBody>
@@ -11524,7 +11569,7 @@
                 <a:ea typeface="Microsoft JhengHei"/>
                 <a:cs typeface="Microsoft JhengHei"/>
               </a:rPr>
-              <a:t>2026 德明X富達投資擂台｜第 2 週週報｜2026-10-12～2026-10-15</a:t>
+              <a:t>2026 德明X富達投資擂台｜第 2 週週報｜2026-10-12～2026-10-16</a:t>
             </a:r>
           </a:p>
         </p:txBody>
@@ -12434,15 +12479,15 @@
               </a:lnSpc>
             </a:pPr>
             <a:r>
-              <a:rPr sz="1300" b="0">
-                <a:solidFill>
-                  <a:srgbClr val="6B7489"/>
-                </a:solidFill>
-                <a:latin typeface="Microsoft JhengHei"/>
-                <a:ea typeface="Microsoft JhengHei"/>
-                <a:cs typeface="Microsoft JhengHei"/>
-              </a:rPr>
-              <a:t>盤中</a:t>
+              <a:rPr sz="1700" b="1">
+                <a:solidFill>
+                  <a:srgbClr val="C8323A"/>
+                </a:solidFill>
+                <a:latin typeface="Bahnschrift"/>
+                <a:ea typeface="Microsoft JhengHei"/>
+                <a:cs typeface="Microsoft JhengHei"/>
+              </a:rPr>
+              <a:t>+0.30%</a:t>
             </a:r>
           </a:p>
         </p:txBody>
@@ -12624,7 +12669,7 @@
                 <a:ea typeface="Microsoft JhengHei"/>
                 <a:cs typeface="Microsoft JhengHei"/>
               </a:rPr>
-              <a:t>2026 德明X富達投資擂台｜第 2 週週報｜2026-10-12～2026-10-15</a:t>
+              <a:t>2026 德明X富達投資擂台｜第 2 週週報｜2026-10-12～2026-10-16</a:t>
             </a:r>
           </a:p>
         </p:txBody>
@@ -13534,15 +13579,15 @@
               </a:lnSpc>
             </a:pPr>
             <a:r>
-              <a:rPr sz="1300" b="0">
-                <a:solidFill>
-                  <a:srgbClr val="6B7489"/>
-                </a:solidFill>
-                <a:latin typeface="Microsoft JhengHei"/>
-                <a:ea typeface="Microsoft JhengHei"/>
-                <a:cs typeface="Microsoft JhengHei"/>
-              </a:rPr>
-              <a:t>盤中</a:t>
+              <a:rPr sz="1700" b="1">
+                <a:solidFill>
+                  <a:srgbClr val="C8323A"/>
+                </a:solidFill>
+                <a:latin typeface="Bahnschrift"/>
+                <a:ea typeface="Microsoft JhengHei"/>
+                <a:cs typeface="Microsoft JhengHei"/>
+              </a:rPr>
+              <a:t>+0.30%</a:t>
             </a:r>
           </a:p>
         </p:txBody>
@@ -13720,7 +13765,7 @@
                 <a:ea typeface="Microsoft JhengHei"/>
                 <a:cs typeface="Microsoft JhengHei"/>
               </a:rPr>
-              <a:t>減碼負面新聞股如潤泰全是正確風險控制。</a:t>
+              <a:t>總資產 -12.51%，落後加權指數 8.04 個百分點</a:t>
             </a:r>
           </a:p>
           <a:p>
@@ -13752,7 +13797,7 @@
                 <a:ea typeface="Microsoft JhengHei"/>
                 <a:cs typeface="Microsoft JhengHei"/>
               </a:rPr>
-              <a:t>依據系統排名與價格位置布局半導體強勢股符合進攻策略。</a:t>
+              <a:t>最大貢獻：5880 合庫金 +40,800 元</a:t>
             </a:r>
           </a:p>
           <a:p>
@@ -13784,7 +13829,39 @@
                 <a:ea typeface="Microsoft JhengHei"/>
                 <a:cs typeface="Microsoft JhengHei"/>
               </a:rPr>
-              <a:t>持股率超過100%主要受期貨虧損影響，需關注期貨部位對淨值的衝擊。</a:t>
+              <a:t>最大拖累：期貨與選擇權 -834,337 元</a:t>
+            </a:r>
+          </a:p>
+          <a:p>
+            <a:pPr algn="l">
+              <a:lnSpc>
+                <a:spcPct val="130000"/>
+              </a:lnSpc>
+              <a:spcAft>
+                <a:spcPts val="770"/>
+              </a:spcAft>
+            </a:pPr>
+            <a:r>
+              <a:rPr sz="770" b="0">
+                <a:solidFill>
+                  <a:srgbClr val="14213D"/>
+                </a:solidFill>
+                <a:latin typeface="Microsoft JhengHei"/>
+                <a:ea typeface="Microsoft JhengHei"/>
+                <a:cs typeface="Microsoft JhengHei"/>
+              </a:rPr>
+              <a:t>■ </a:t>
+            </a:r>
+            <a:r>
+              <a:rPr sz="1400" b="0">
+                <a:solidFill>
+                  <a:srgbClr val="3B4763"/>
+                </a:solidFill>
+                <a:latin typeface="Microsoft JhengHei"/>
+                <a:ea typeface="Microsoft JhengHei"/>
+                <a:cs typeface="Microsoft JhengHei"/>
+              </a:rPr>
+              <a:t>本週 8 筆成交中，5 筆依系統建議、3 筆自行判斷</a:t>
             </a:r>
           </a:p>
         </p:txBody>
@@ -13924,7 +14001,7 @@
                 <a:ea typeface="Microsoft JhengHei"/>
                 <a:cs typeface="Microsoft JhengHei"/>
               </a:rPr>
-              <a:t>目標配置：進攻籃80%，穩健籃20%，ETF籃0%。</a:t>
+              <a:t>下週建議關注：3591 艾笛森、2103 台橡</a:t>
             </a:r>
           </a:p>
           <a:p>
@@ -13956,7 +14033,7 @@
                 <a:ea typeface="Microsoft JhengHei"/>
                 <a:cs typeface="Microsoft JhengHei"/>
               </a:rPr>
-              <a:t>建議買進：2103 台橡。</a:t>
+              <a:t>期貨：依系統條件判斷</a:t>
             </a:r>
           </a:p>
           <a:p>
@@ -13988,7 +14065,7 @@
                 <a:ea typeface="Microsoft JhengHei"/>
                 <a:cs typeface="Microsoft JhengHei"/>
               </a:rPr>
-              <a:t>尚未達標的規則：累積報酬為正（才列入排名）。</a:t>
+              <a:t>留意規則：累積報酬為正（才列入排名）</a:t>
             </a:r>
           </a:p>
         </p:txBody>
@@ -14029,7 +14106,7 @@
                 <a:ea typeface="Microsoft JhengHei"/>
                 <a:cs typeface="Microsoft JhengHei"/>
               </a:rPr>
-              <a:t>2026 德明X富達投資擂台｜第 2 週週報｜2026-10-12～2026-10-15</a:t>
+              <a:t>2026 德明X富達投資擂台｜第 2 週週報｜2026-10-12～2026-10-16</a:t>
             </a:r>
           </a:p>
         </p:txBody>
@@ -14129,7 +14206,7 @@
                 <a:ea typeface="Microsoft JhengHei"/>
                 <a:cs typeface="Microsoft JhengHei"/>
               </a:rPr>
-              <a:t>本週新聞來源（1/2）</a:t>
+              <a:t>本週新聞來源（1/3）</a:t>
             </a:r>
           </a:p>
         </p:txBody>
@@ -14982,7 +15059,7 @@
                 <a:ea typeface="Microsoft JhengHei"/>
                 <a:cs typeface="Microsoft JhengHei"/>
               </a:rPr>
-              <a:t>2026 德明X富達投資擂台｜第 2 週週報｜2026-10-12～2026-10-15</a:t>
+              <a:t>2026 德明X富達投資擂台｜第 2 週週報｜2026-10-12～2026-10-16</a:t>
             </a:r>
           </a:p>
         </p:txBody>
@@ -15082,7 +15159,7 @@
                 <a:ea typeface="Microsoft JhengHei"/>
                 <a:cs typeface="Microsoft JhengHei"/>
               </a:rPr>
-              <a:t>本週新聞來源（2/2）</a:t>
+              <a:t>本週新聞來源（2/3）</a:t>
             </a:r>
           </a:p>
         </p:txBody>
@@ -15809,6 +15886,94 @@
               <a:t>　MoneyDJ　等 3 則報導</a:t>
             </a:r>
           </a:p>
+          <a:p>
+            <a:pPr algn="l">
+              <a:lnSpc>
+                <a:spcPct val="115000"/>
+              </a:lnSpc>
+              <a:spcAft>
+                <a:spcPts val="500"/>
+              </a:spcAft>
+            </a:pPr>
+            <a:r>
+              <a:rPr sz="1000" b="0">
+                <a:solidFill>
+                  <a:srgbClr val="6B7489"/>
+                </a:solidFill>
+                <a:latin typeface="Microsoft JhengHei"/>
+                <a:ea typeface="Microsoft JhengHei"/>
+                <a:cs typeface="Microsoft JhengHei"/>
+              </a:rPr>
+              <a:t>週五 10/16　</a:t>
+            </a:r>
+            <a:r>
+              <a:rPr sz="1100" b="0" u="sng">
+                <a:solidFill>
+                  <a:srgbClr val="1F5FBF"/>
+                </a:solidFill>
+                <a:latin typeface="Microsoft JhengHei"/>
+                <a:ea typeface="Microsoft JhengHei"/>
+                <a:cs typeface="Microsoft JhengHei"/>
+                <a:hlinkClick r:id="rId16"/>
+              </a:rPr>
+              <a:t>台股重挫1655點失守47K大關，外資單日賣超3025.55億元創歷史新高</a:t>
+            </a:r>
+            <a:r>
+              <a:rPr sz="900" b="0">
+                <a:solidFill>
+                  <a:srgbClr val="6B7489"/>
+                </a:solidFill>
+                <a:latin typeface="Microsoft JhengHei"/>
+                <a:ea typeface="Microsoft JhengHei"/>
+                <a:cs typeface="Microsoft JhengHei"/>
+              </a:rPr>
+              <a:t>　翻爆　等 3 則報導</a:t>
+            </a:r>
+          </a:p>
+          <a:p>
+            <a:pPr algn="l">
+              <a:lnSpc>
+                <a:spcPct val="115000"/>
+              </a:lnSpc>
+              <a:spcAft>
+                <a:spcPts val="500"/>
+              </a:spcAft>
+            </a:pPr>
+            <a:r>
+              <a:rPr sz="1000" b="0">
+                <a:solidFill>
+                  <a:srgbClr val="6B7489"/>
+                </a:solidFill>
+                <a:latin typeface="Microsoft JhengHei"/>
+                <a:ea typeface="Microsoft JhengHei"/>
+                <a:cs typeface="Microsoft JhengHei"/>
+              </a:rPr>
+              <a:t>週五 10/16　</a:t>
+            </a:r>
+            <a:r>
+              <a:rPr sz="1100" b="0" u="sng">
+                <a:solidFill>
+                  <a:srgbClr val="1F5FBF"/>
+                </a:solidFill>
+                <a:latin typeface="Microsoft JhengHei"/>
+                <a:ea typeface="Microsoft JhengHei"/>
+                <a:cs typeface="Microsoft JhengHei"/>
+                <a:hlinkClick r:id="rId17"/>
+              </a:rPr>
+              <a:t>美股道瓊終場漲逾500點，投資人轉向AI以外標的</a:t>
+            </a:r>
+            <a:r>
+              <a:rPr sz="900" b="0">
+                <a:solidFill>
+                  <a:srgbClr val="6B7489"/>
+                </a:solidFill>
+                <a:latin typeface="Microsoft JhengHei"/>
+                <a:ea typeface="Microsoft JhengHei"/>
+                <a:cs typeface="Microsoft JhengHei"/>
+              </a:rPr>
+              <a:t>　　等 2 則報導</a:t>
+            </a:r>
+          </a:p>
         </p:txBody>
       </p:sp>
       <p:sp>
@@ -15847,7 +16012,7 @@
                 <a:ea typeface="Microsoft JhengHei"/>
                 <a:cs typeface="Microsoft JhengHei"/>
               </a:rPr>
-              <a:t>2026 德明X富達投資擂台｜第 2 週週報｜2026-10-12～2026-10-15</a:t>
+              <a:t>2026 德明X富達投資擂台｜第 2 週週報｜2026-10-12～2026-10-16</a:t>
             </a:r>
           </a:p>
         </p:txBody>
@@ -15947,7 +16112,7 @@
                 <a:ea typeface="Microsoft JhengHei"/>
                 <a:cs typeface="Microsoft JhengHei"/>
               </a:rPr>
-              <a:t>週報檢查結果（1/2）</a:t>
+              <a:t>本週新聞來源（3/3）</a:t>
             </a:r>
           </a:p>
         </p:txBody>
@@ -15988,7 +16153,476 @@
                 <a:ea typeface="Microsoft JhengHei"/>
                 <a:cs typeface="Microsoft JhengHei"/>
               </a:rPr>
-              <a:t>通過 15 項・已自動修正 1 項・需注意 2 項・錯誤 0 項</a:t>
+              <a:t>週報引用的事件與原始新聞；點標題開啟原文</a:t>
+            </a:r>
+          </a:p>
+        </p:txBody>
+      </p:sp>
+      <p:sp>
+        <p:nvSpPr>
+          <p:cNvPr id="4" name="TextBox 3"/>
+          <p:cNvSpPr txBox="1"/>
+          <p:nvPr/>
+        </p:nvSpPr>
+        <p:spPr>
+          <a:xfrm>
+            <a:off x="548640" y="1600200"/>
+            <a:ext cx="11094415" cy="4754880"/>
+          </a:xfrm>
+          <a:prstGeom prst="rect">
+            <a:avLst/>
+          </a:prstGeom>
+          <a:noFill/>
+        </p:spPr>
+        <p:txBody>
+          <a:bodyPr wrap="square" lIns="0" rIns="0" tIns="0" bIns="0" anchor="t">
+            <a:spAutoFit/>
+          </a:bodyPr>
+          <a:lstStyle/>
+          <a:p>
+            <a:pPr algn="l">
+              <a:lnSpc>
+                <a:spcPct val="115000"/>
+              </a:lnSpc>
+              <a:spcAft>
+                <a:spcPts val="500"/>
+              </a:spcAft>
+            </a:pPr>
+            <a:r>
+              <a:rPr sz="1000" b="0">
+                <a:solidFill>
+                  <a:srgbClr val="6B7489"/>
+                </a:solidFill>
+                <a:latin typeface="Microsoft JhengHei"/>
+                <a:ea typeface="Microsoft JhengHei"/>
+                <a:cs typeface="Microsoft JhengHei"/>
+              </a:rPr>
+              <a:t>週五 10/16　</a:t>
+            </a:r>
+            <a:r>
+              <a:rPr sz="1100" b="0" u="sng">
+                <a:solidFill>
+                  <a:srgbClr val="1F5FBF"/>
+                </a:solidFill>
+                <a:latin typeface="Microsoft JhengHei"/>
+                <a:ea typeface="Microsoft JhengHei"/>
+                <a:cs typeface="Microsoft JhengHei"/>
+                <a:hlinkClick r:id="rId2"/>
+              </a:rPr>
+              <a:t>美9月PPI年增6.3%創2022年來最大，通膨升溫使市場再度押注聯準會升息</a:t>
+            </a:r>
+            <a:r>
+              <a:rPr sz="900" b="0">
+                <a:solidFill>
+                  <a:srgbClr val="6B7489"/>
+                </a:solidFill>
+                <a:latin typeface="Microsoft JhengHei"/>
+                <a:ea typeface="Microsoft JhengHei"/>
+                <a:cs typeface="Microsoft JhengHei"/>
+              </a:rPr>
+              <a:t>　　等 3 則報導</a:t>
+            </a:r>
+          </a:p>
+          <a:p>
+            <a:pPr algn="l">
+              <a:lnSpc>
+                <a:spcPct val="115000"/>
+              </a:lnSpc>
+              <a:spcAft>
+                <a:spcPts val="500"/>
+              </a:spcAft>
+            </a:pPr>
+            <a:r>
+              <a:rPr sz="1000" b="0">
+                <a:solidFill>
+                  <a:srgbClr val="6B7489"/>
+                </a:solidFill>
+                <a:latin typeface="Microsoft JhengHei"/>
+                <a:ea typeface="Microsoft JhengHei"/>
+                <a:cs typeface="Microsoft JhengHei"/>
+              </a:rPr>
+              <a:t>週五 10/16　</a:t>
+            </a:r>
+            <a:r>
+              <a:rPr sz="1100" b="0" u="sng">
+                <a:solidFill>
+                  <a:srgbClr val="1F5FBF"/>
+                </a:solidFill>
+                <a:latin typeface="Microsoft JhengHei"/>
+                <a:ea typeface="Microsoft JhengHei"/>
+                <a:cs typeface="Microsoft JhengHei"/>
+                <a:hlinkClick r:id="rId3"/>
+              </a:rPr>
+              <a:t>外資提款主動台股ETF突圍吸金，顯示資金流入防禦性ETF</a:t>
+            </a:r>
+            <a:r>
+              <a:rPr sz="900" b="0">
+                <a:solidFill>
+                  <a:srgbClr val="6B7489"/>
+                </a:solidFill>
+                <a:latin typeface="Microsoft JhengHei"/>
+                <a:ea typeface="Microsoft JhengHei"/>
+                <a:cs typeface="Microsoft JhengHei"/>
+              </a:rPr>
+              <a:t>　中時新聞網　等 3 則報導</a:t>
+            </a:r>
+          </a:p>
+          <a:p>
+            <a:pPr algn="l">
+              <a:lnSpc>
+                <a:spcPct val="115000"/>
+              </a:lnSpc>
+              <a:spcAft>
+                <a:spcPts val="500"/>
+              </a:spcAft>
+            </a:pPr>
+            <a:r>
+              <a:rPr sz="1000" b="0">
+                <a:solidFill>
+                  <a:srgbClr val="6B7489"/>
+                </a:solidFill>
+                <a:latin typeface="Microsoft JhengHei"/>
+                <a:ea typeface="Microsoft JhengHei"/>
+                <a:cs typeface="Microsoft JhengHei"/>
+              </a:rPr>
+              <a:t>週五 10/16　</a:t>
+            </a:r>
+            <a:r>
+              <a:rPr sz="1100" b="0" u="sng">
+                <a:solidFill>
+                  <a:srgbClr val="1F5FBF"/>
+                </a:solidFill>
+                <a:latin typeface="Microsoft JhengHei"/>
+                <a:ea typeface="Microsoft JhengHei"/>
+                <a:cs typeface="Microsoft JhengHei"/>
+                <a:hlinkClick r:id="rId4"/>
+              </a:rPr>
+              <a:t>元大台灣50(0050)獲淨申購378億元創歷史新高，穩居投資人低接最佳標的</a:t>
+            </a:r>
+            <a:r>
+              <a:rPr sz="900" b="0">
+                <a:solidFill>
+                  <a:srgbClr val="6B7489"/>
+                </a:solidFill>
+                <a:latin typeface="Microsoft JhengHei"/>
+                <a:ea typeface="Microsoft JhengHei"/>
+                <a:cs typeface="Microsoft JhengHei"/>
+              </a:rPr>
+              <a:t>　</a:t>
+            </a:r>
+          </a:p>
+          <a:p>
+            <a:pPr algn="l">
+              <a:lnSpc>
+                <a:spcPct val="115000"/>
+              </a:lnSpc>
+              <a:spcAft>
+                <a:spcPts val="500"/>
+              </a:spcAft>
+            </a:pPr>
+            <a:r>
+              <a:rPr sz="1000" b="0">
+                <a:solidFill>
+                  <a:srgbClr val="6B7489"/>
+                </a:solidFill>
+                <a:latin typeface="Microsoft JhengHei"/>
+                <a:ea typeface="Microsoft JhengHei"/>
+                <a:cs typeface="Microsoft JhengHei"/>
+              </a:rPr>
+              <a:t>週五 10/16　</a:t>
+            </a:r>
+            <a:r>
+              <a:rPr sz="1100" b="0" u="sng">
+                <a:solidFill>
+                  <a:srgbClr val="1F5FBF"/>
+                </a:solidFill>
+                <a:latin typeface="Microsoft JhengHei"/>
+                <a:ea typeface="Microsoft JhengHei"/>
+                <a:cs typeface="Microsoft JhengHei"/>
+                <a:hlinkClick r:id="rId5"/>
+              </a:rPr>
+              <a:t>美元和美債殖利率下滑 金價反彈</a:t>
+            </a:r>
+            <a:r>
+              <a:rPr sz="900" b="0">
+                <a:solidFill>
+                  <a:srgbClr val="6B7489"/>
+                </a:solidFill>
+                <a:latin typeface="Microsoft JhengHei"/>
+                <a:ea typeface="Microsoft JhengHei"/>
+                <a:cs typeface="Microsoft JhengHei"/>
+              </a:rPr>
+              <a:t>　鉅亨網</a:t>
+            </a:r>
+          </a:p>
+          <a:p>
+            <a:pPr algn="l">
+              <a:lnSpc>
+                <a:spcPct val="115000"/>
+              </a:lnSpc>
+              <a:spcAft>
+                <a:spcPts val="500"/>
+              </a:spcAft>
+            </a:pPr>
+            <a:r>
+              <a:rPr sz="1000" b="0">
+                <a:solidFill>
+                  <a:srgbClr val="6B7489"/>
+                </a:solidFill>
+                <a:latin typeface="Microsoft JhengHei"/>
+                <a:ea typeface="Microsoft JhengHei"/>
+                <a:cs typeface="Microsoft JhengHei"/>
+              </a:rPr>
+              <a:t>週五 10/16　</a:t>
+            </a:r>
+            <a:r>
+              <a:rPr sz="1100" b="0" u="sng">
+                <a:solidFill>
+                  <a:srgbClr val="1F5FBF"/>
+                </a:solidFill>
+                <a:latin typeface="Microsoft JhengHei"/>
+                <a:ea typeface="Microsoft JhengHei"/>
+                <a:cs typeface="Microsoft JhengHei"/>
+                <a:hlinkClick r:id="rId2"/>
+              </a:rPr>
+              <a:t>美9月PPI月增1.3%、年增6.3%，創4年半來最快增幅</a:t>
+            </a:r>
+            <a:r>
+              <a:rPr sz="900" b="0">
+                <a:solidFill>
+                  <a:srgbClr val="6B7489"/>
+                </a:solidFill>
+                <a:latin typeface="Microsoft JhengHei"/>
+                <a:ea typeface="Microsoft JhengHei"/>
+                <a:cs typeface="Microsoft JhengHei"/>
+              </a:rPr>
+              <a:t>　　等 3 則報導</a:t>
+            </a:r>
+          </a:p>
+          <a:p>
+            <a:pPr algn="l">
+              <a:lnSpc>
+                <a:spcPct val="115000"/>
+              </a:lnSpc>
+              <a:spcAft>
+                <a:spcPts val="500"/>
+              </a:spcAft>
+            </a:pPr>
+            <a:r>
+              <a:rPr sz="1000" b="0">
+                <a:solidFill>
+                  <a:srgbClr val="6B7489"/>
+                </a:solidFill>
+                <a:latin typeface="Microsoft JhengHei"/>
+                <a:ea typeface="Microsoft JhengHei"/>
+                <a:cs typeface="Microsoft JhengHei"/>
+              </a:rPr>
+              <a:t>週五 10/16　</a:t>
+            </a:r>
+            <a:r>
+              <a:rPr sz="1100" b="0" u="sng">
+                <a:solidFill>
+                  <a:srgbClr val="1F5FBF"/>
+                </a:solidFill>
+                <a:latin typeface="Microsoft JhengHei"/>
+                <a:ea typeface="Microsoft JhengHei"/>
+                <a:cs typeface="Microsoft JhengHei"/>
+                <a:hlinkClick r:id="rId6"/>
+              </a:rPr>
+              <a:t>台積電ADR跌近2% AI大廠搶產能競爭白熱化</a:t>
+            </a:r>
+            <a:r>
+              <a:rPr sz="900" b="0">
+                <a:solidFill>
+                  <a:srgbClr val="6B7489"/>
+                </a:solidFill>
+                <a:latin typeface="Microsoft JhengHei"/>
+                <a:ea typeface="Microsoft JhengHei"/>
+                <a:cs typeface="Microsoft JhengHei"/>
+              </a:rPr>
+              <a:t>　　等 3 則報導</a:t>
+            </a:r>
+          </a:p>
+        </p:txBody>
+      </p:sp>
+      <p:sp>
+        <p:nvSpPr>
+          <p:cNvPr id="5" name="TextBox 4"/>
+          <p:cNvSpPr txBox="1"/>
+          <p:nvPr/>
+        </p:nvSpPr>
+        <p:spPr>
+          <a:xfrm>
+            <a:off x="548640" y="6473952"/>
+            <a:ext cx="7315200" cy="228600"/>
+          </a:xfrm>
+          <a:prstGeom prst="rect">
+            <a:avLst/>
+          </a:prstGeom>
+          <a:noFill/>
+        </p:spPr>
+        <p:txBody>
+          <a:bodyPr wrap="square" lIns="0" rIns="0" tIns="0" bIns="0" anchor="t">
+            <a:spAutoFit/>
+          </a:bodyPr>
+          <a:lstStyle/>
+          <a:p>
+            <a:pPr algn="l">
+              <a:lnSpc>
+                <a:spcPct val="115000"/>
+              </a:lnSpc>
+            </a:pPr>
+            <a:r>
+              <a:rPr sz="900" b="0">
+                <a:solidFill>
+                  <a:srgbClr val="6B7489"/>
+                </a:solidFill>
+                <a:latin typeface="Microsoft JhengHei"/>
+                <a:ea typeface="Microsoft JhengHei"/>
+                <a:cs typeface="Microsoft JhengHei"/>
+              </a:rPr>
+              <a:t>2026 德明X富達投資擂台｜第 2 週週報｜2026-10-12～2026-10-16</a:t>
+            </a:r>
+          </a:p>
+        </p:txBody>
+      </p:sp>
+      <p:sp>
+        <p:nvSpPr>
+          <p:cNvPr id="6" name="TextBox 5"/>
+          <p:cNvSpPr txBox="1"/>
+          <p:nvPr/>
+        </p:nvSpPr>
+        <p:spPr>
+          <a:xfrm>
+            <a:off x="10728655" y="6473952"/>
+            <a:ext cx="914400" cy="228600"/>
+          </a:xfrm>
+          <a:prstGeom prst="rect">
+            <a:avLst/>
+          </a:prstGeom>
+          <a:noFill/>
+        </p:spPr>
+        <p:txBody>
+          <a:bodyPr wrap="square" lIns="0" rIns="0" tIns="0" bIns="0" anchor="t">
+            <a:spAutoFit/>
+          </a:bodyPr>
+          <a:lstStyle/>
+          <a:p>
+            <a:pPr algn="r">
+              <a:lnSpc>
+                <a:spcPct val="115000"/>
+              </a:lnSpc>
+            </a:pPr>
+            <a:r>
+              <a:rPr sz="900" b="0">
+                <a:solidFill>
+                  <a:srgbClr val="6B7489"/>
+                </a:solidFill>
+                <a:latin typeface="Bahnschrift"/>
+                <a:ea typeface="Microsoft JhengHei"/>
+                <a:cs typeface="Microsoft JhengHei"/>
+              </a:rPr>
+              <a:t>16</a:t>
+            </a:r>
+          </a:p>
+        </p:txBody>
+      </p:sp>
+    </p:spTree>
+  </p:cSld>
+  <p:clrMapOvr>
+    <a:masterClrMapping/>
+  </p:clrMapOvr>
+</p:sld>
+</file>
+
+<file path=ppt/slides/slide17.xml><?xml version="1.0" encoding="utf-8"?>
+<p:sld xmlns:a="http://schemas.openxmlformats.org/drawingml/2006/main" xmlns:p="http://schemas.openxmlformats.org/presentationml/2006/main" xmlns:r="http://schemas.openxmlformats.org/officeDocument/2006/relationships">
+  <p:cSld>
+    <p:spTree>
+      <p:nvGrpSpPr>
+        <p:cNvPr id="1" name=""/>
+        <p:cNvGrpSpPr/>
+        <p:nvPr/>
+      </p:nvGrpSpPr>
+      <p:grpSpPr/>
+      <p:sp>
+        <p:nvSpPr>
+          <p:cNvPr id="2" name="TextBox 1"/>
+          <p:cNvSpPr txBox="1"/>
+          <p:nvPr/>
+        </p:nvSpPr>
+        <p:spPr>
+          <a:xfrm>
+            <a:off x="548640" y="731520"/>
+            <a:ext cx="11094415" cy="548640"/>
+          </a:xfrm>
+          <a:prstGeom prst="rect">
+            <a:avLst/>
+          </a:prstGeom>
+          <a:noFill/>
+        </p:spPr>
+        <p:txBody>
+          <a:bodyPr wrap="square" lIns="0" rIns="0" tIns="0" bIns="0" anchor="t">
+            <a:spAutoFit/>
+          </a:bodyPr>
+          <a:lstStyle/>
+          <a:p>
+            <a:pPr algn="l">
+              <a:lnSpc>
+                <a:spcPct val="115000"/>
+              </a:lnSpc>
+            </a:pPr>
+            <a:r>
+              <a:rPr sz="2600" b="1">
+                <a:solidFill>
+                  <a:srgbClr val="14213D"/>
+                </a:solidFill>
+                <a:latin typeface="Microsoft JhengHei"/>
+                <a:ea typeface="Microsoft JhengHei"/>
+                <a:cs typeface="Microsoft JhengHei"/>
+              </a:rPr>
+              <a:t>週報檢查結果（1/2）</a:t>
+            </a:r>
+          </a:p>
+        </p:txBody>
+      </p:sp>
+      <p:sp>
+        <p:nvSpPr>
+          <p:cNvPr id="3" name="TextBox 2"/>
+          <p:cNvSpPr txBox="1"/>
+          <p:nvPr/>
+        </p:nvSpPr>
+        <p:spPr>
+          <a:xfrm>
+            <a:off x="548640" y="1298448"/>
+            <a:ext cx="11094415" cy="320040"/>
+          </a:xfrm>
+          <a:prstGeom prst="rect">
+            <a:avLst/>
+          </a:prstGeom>
+          <a:noFill/>
+        </p:spPr>
+        <p:txBody>
+          <a:bodyPr wrap="square" lIns="0" rIns="0" tIns="0" bIns="0" anchor="t">
+            <a:spAutoFit/>
+          </a:bodyPr>
+          <a:lstStyle/>
+          <a:p>
+            <a:pPr algn="l">
+              <a:lnSpc>
+                <a:spcPct val="115000"/>
+              </a:lnSpc>
+            </a:pPr>
+            <a:r>
+              <a:rPr sz="1300" b="0">
+                <a:solidFill>
+                  <a:srgbClr val="6B7489"/>
+                </a:solidFill>
+                <a:latin typeface="Microsoft JhengHei"/>
+                <a:ea typeface="Microsoft JhengHei"/>
+                <a:cs typeface="Microsoft JhengHei"/>
+              </a:rPr>
+              <a:t>通過 14 項・已自動修正 1 項・需注意 3 項・錯誤 0 項</a:t>
             </a:r>
           </a:p>
         </p:txBody>
@@ -16294,7 +16928,7 @@
                           <a:ea typeface="Microsoft JhengHei"/>
                           <a:cs typeface="Microsoft JhengHei"/>
                         </a:rPr>
-                        <a:t>9,979,013 → 8,580,889，-14.01%</a:t>
+                        <a:t>9,979,013 → 8,730,907，-12.51%</a:t>
                       </a:r>
                     </a:p>
                   </a:txBody>
@@ -16440,7 +17074,7 @@
                           <a:ea typeface="Microsoft JhengHei"/>
                           <a:cs typeface="Microsoft JhengHei"/>
                         </a:rPr>
-                        <a:t>2026-10-15 8,580,889</a:t>
+                        <a:t>2026-10-16：8,730,907</a:t>
                       </a:r>
                     </a:p>
                   </a:txBody>
@@ -16586,7 +17220,7 @@
                           <a:ea typeface="Microsoft JhengHei"/>
                           <a:cs typeface="Microsoft JhengHei"/>
                         </a:rPr>
-                        <a:t>加總 -1,398,123，總資產變動 -1,398,124</a:t>
+                        <a:t>加總 -1,248,106，總資產變動 -1,248,106</a:t>
                       </a:r>
                     </a:p>
                   </a:txBody>
@@ -16732,7 +17366,7 @@
                           <a:ea typeface="Microsoft JhengHei"/>
                           <a:cs typeface="Microsoft JhengHei"/>
                         </a:rPr>
-                        <a:t>每日連乘 -4.75%，本週 -4.75%</a:t>
+                        <a:t>每日連乘 -4.47%，本週 -4.47%</a:t>
                       </a:r>
                     </a:p>
                   </a:txBody>
@@ -17170,7 +17804,7 @@
                           <a:ea typeface="Microsoft JhengHei"/>
                           <a:cs typeface="Microsoft JhengHei"/>
                         </a:rPr>
-                        <a:t>104.2% 超過 100%：期貨未實現虧損讓分母變小（不是融資），文字已加註</a:t>
+                        <a:t>100.4% 超過 100%：期貨未實現虧損讓分母變小（不是融資），文字已加註</a:t>
                       </a:r>
                     </a:p>
                   </a:txBody>
@@ -17671,7 +18305,7 @@
                 <a:ea typeface="Microsoft JhengHei"/>
                 <a:cs typeface="Microsoft JhengHei"/>
               </a:rPr>
-              <a:t>2026 德明X富達投資擂台｜第 2 週週報｜2026-10-12～2026-10-15</a:t>
+              <a:t>2026 德明X富達投資擂台｜第 2 週週報｜2026-10-12～2026-10-16</a:t>
             </a:r>
           </a:p>
         </p:txBody>
@@ -17712,7 +18346,7 @@
                 <a:ea typeface="Microsoft JhengHei"/>
                 <a:cs typeface="Microsoft JhengHei"/>
               </a:rPr>
-              <a:t>16</a:t>
+              <a:t>17</a:t>
             </a:r>
           </a:p>
         </p:txBody>
@@ -17725,7 +18359,7 @@
 </p:sld>
 </file>
 
-<file path=ppt/slides/slide17.xml><?xml version="1.0" encoding="utf-8"?>
+<file path=ppt/slides/slide18.xml><?xml version="1.0" encoding="utf-8"?>
 <p:sld xmlns:a="http://schemas.openxmlformats.org/drawingml/2006/main" xmlns:p="http://schemas.openxmlformats.org/presentationml/2006/main" xmlns:r="http://schemas.openxmlformats.org/officeDocument/2006/relationships">
   <p:cSld>
     <p:spTree>
@@ -17812,7 +18446,7 @@
                 <a:ea typeface="Microsoft JhengHei"/>
                 <a:cs typeface="Microsoft JhengHei"/>
               </a:rPr>
-              <a:t>通過 15 項・已自動修正 1 項・需注意 2 項・錯誤 0 項</a:t>
+              <a:t>通過 14 項・已自動修正 1 項・需注意 3 項・錯誤 0 項</a:t>
             </a:r>
           </a:p>
         </p:txBody>
@@ -18702,7 +19336,7 @@
                           <a:ea typeface="Microsoft JhengHei"/>
                           <a:cs typeface="Microsoft JhengHei"/>
                         </a:rPr>
-                        <a:t>5 則皆一致</a:t>
+                        <a:t>8 則皆一致</a:t>
                       </a:r>
                     </a:p>
                   </a:txBody>
@@ -18806,13 +19440,13 @@
                       <a:r>
                         <a:rPr sz="1200" b="0">
                           <a:solidFill>
-                            <a:srgbClr val="178A55"/>
+                            <a:srgbClr val="1F5FBF"/>
                           </a:solidFill>
                           <a:latin typeface="Microsoft JhengHei"/>
                           <a:ea typeface="Microsoft JhengHei"/>
                           <a:cs typeface="Microsoft JhengHei"/>
                         </a:rPr>
-                        <a:t>通過</a:t>
+                        <a:t>已修正</a:t>
                       </a:r>
                     </a:p>
                   </a:txBody>
@@ -18848,7 +19482,7 @@
                           <a:ea typeface="Microsoft JhengHei"/>
                           <a:cs typeface="Microsoft JhengHei"/>
                         </a:rPr>
-                        <a:t>一致</a:t>
+                        <a:t>改寫：週三、週五</a:t>
                       </a:r>
                     </a:p>
                   </a:txBody>
@@ -18952,13 +19586,13 @@
                       <a:r>
                         <a:rPr sz="1200" b="0">
                           <a:solidFill>
-                            <a:srgbClr val="1F5FBF"/>
+                            <a:srgbClr val="178A55"/>
                           </a:solidFill>
                           <a:latin typeface="Microsoft JhengHei"/>
                           <a:ea typeface="Microsoft JhengHei"/>
                           <a:cs typeface="Microsoft JhengHei"/>
                         </a:rPr>
-                        <a:t>已修正</a:t>
+                        <a:t>通過</a:t>
                       </a:r>
                     </a:p>
                   </a:txBody>
@@ -18994,7 +19628,7 @@
                           <a:ea typeface="Microsoft JhengHei"/>
                           <a:cs typeface="Microsoft JhengHei"/>
                         </a:rPr>
-                        <a:t>刪除 1 句</a:t>
+                        <a:t>無</a:t>
                       </a:r>
                     </a:p>
                   </a:txBody>
@@ -19098,13 +19732,13 @@
                       <a:r>
                         <a:rPr sz="1200" b="0">
                           <a:solidFill>
-                            <a:srgbClr val="178A55"/>
+                            <a:srgbClr val="B4560F"/>
                           </a:solidFill>
                           <a:latin typeface="Microsoft JhengHei"/>
                           <a:ea typeface="Microsoft JhengHei"/>
                           <a:cs typeface="Microsoft JhengHei"/>
                         </a:rPr>
-                        <a:t>通過</a:t>
+                        <a:t>注意</a:t>
                       </a:r>
                     </a:p>
                   </a:txBody>
@@ -19140,7 +19774,7 @@
                           <a:ea typeface="Microsoft JhengHei"/>
                           <a:cs typeface="Microsoft JhengHei"/>
                         </a:rPr>
-                        <a:t>所有數字可在資料中找到</a:t>
+                        <a:t>未通過核對，改用固定格式文字</a:t>
                       </a:r>
                     </a:p>
                   </a:txBody>
@@ -19203,7 +19837,7 @@
                 <a:ea typeface="Microsoft JhengHei"/>
                 <a:cs typeface="Microsoft JhengHei"/>
               </a:rPr>
-              <a:t>2026 德明X富達投資擂台｜第 2 週週報｜2026-10-12～2026-10-15</a:t>
+              <a:t>2026 德明X富達投資擂台｜第 2 週週報｜2026-10-12～2026-10-16</a:t>
             </a:r>
           </a:p>
         </p:txBody>
@@ -19244,7 +19878,7 @@
                 <a:ea typeface="Microsoft JhengHei"/>
                 <a:cs typeface="Microsoft JhengHei"/>
               </a:rPr>
-              <a:t>17</a:t>
+              <a:t>18</a:t>
             </a:r>
           </a:p>
         </p:txBody>
@@ -19257,7 +19891,7 @@
 </p:sld>
 </file>
 
-<file path=ppt/slides/slide18.xml><?xml version="1.0" encoding="utf-8"?>
+<file path=ppt/slides/slide19.xml><?xml version="1.0" encoding="utf-8"?>
 <p:sld xmlns:a="http://schemas.openxmlformats.org/drawingml/2006/main" xmlns:p="http://schemas.openxmlformats.org/presentationml/2006/main" xmlns:r="http://schemas.openxmlformats.org/officeDocument/2006/relationships">
   <p:cSld>
     <p:spTree>
@@ -19518,7 +20152,7 @@
                 <a:ea typeface="Microsoft JhengHei"/>
                 <a:cs typeface="Microsoft JhengHei"/>
               </a:rPr>
-              <a:t>文字說明由開源 AI 模型依上述資料撰寫，所有數字已逐一與資料核對</a:t>
+              <a:t>文字說明採固定格式自動產生（AI 服務暫時無法使用或未通過數字核對）</a:t>
             </a:r>
           </a:p>
           <a:p>
@@ -19591,7 +20225,7 @@
                 <a:ea typeface="Microsoft JhengHei"/>
                 <a:cs typeface="Microsoft JhengHei"/>
               </a:rPr>
-              <a:t>2026 德明X富達投資擂台｜第 2 週週報｜2026-10-12～2026-10-15</a:t>
+              <a:t>2026 德明X富達投資擂台｜第 2 週週報｜2026-10-12～2026-10-16</a:t>
             </a:r>
           </a:p>
         </p:txBody>
@@ -19632,7 +20266,7 @@
                 <a:ea typeface="Microsoft JhengHei"/>
                 <a:cs typeface="Microsoft JhengHei"/>
               </a:rPr>
-              <a:t>18</a:t>
+              <a:t>19</a:t>
             </a:r>
           </a:p>
         </p:txBody>
@@ -20501,15 +21135,15 @@
               </a:lnSpc>
             </a:pPr>
             <a:r>
-              <a:rPr sz="1300" b="0">
-                <a:solidFill>
-                  <a:srgbClr val="6B7489"/>
-                </a:solidFill>
-                <a:latin typeface="Microsoft JhengHei"/>
-                <a:ea typeface="Microsoft JhengHei"/>
-                <a:cs typeface="Microsoft JhengHei"/>
-              </a:rPr>
-              <a:t>盤中</a:t>
+              <a:rPr sz="1700" b="1">
+                <a:solidFill>
+                  <a:srgbClr val="C8323A"/>
+                </a:solidFill>
+                <a:latin typeface="Bahnschrift"/>
+                <a:ea typeface="Microsoft JhengHei"/>
+                <a:cs typeface="Microsoft JhengHei"/>
+              </a:rPr>
+              <a:t>+0.30%</a:t>
             </a:r>
           </a:p>
         </p:txBody>
@@ -20632,7 +21266,7 @@
                 <a:ea typeface="Microsoft JhengHei"/>
                 <a:cs typeface="Microsoft JhengHei"/>
               </a:rPr>
-              <a:t>本週虧損14.01%，大盤下跌4.75%，主要因期貨虧損導致持股率超過100%，操作上減碼負面新聞股並布局半導體強勢股。</a:t>
+              <a:t>本週總資產 -12.51%，加權指數 -4.47%，成交 8 筆</a:t>
             </a:r>
           </a:p>
         </p:txBody>
@@ -20687,7 +21321,7 @@
                 <a:ea typeface="Microsoft JhengHei"/>
                 <a:cs typeface="Microsoft JhengHei"/>
               </a:rPr>
-              <a:t>週報酬-14.01%，較大盤-4.75%表現較差，主要受期貨未實現虧損影響。</a:t>
+              <a:t>總資產由 9,979,013 元變為 8,730,907 元，累積報酬 -12.69%</a:t>
             </a:r>
           </a:p>
           <a:p>
@@ -20719,7 +21353,39 @@
                 <a:ea typeface="Microsoft JhengHei"/>
                 <a:cs typeface="Microsoft JhengHei"/>
               </a:rPr>
-              <a:t>本週共8筆成交，減碼潤泰全、聯茂，買進合晶、欣興、中砂等半導體與電子零組件股。</a:t>
+              <a:t>期末持股率 100.4%（規則下限 70%）</a:t>
+            </a:r>
+          </a:p>
+          <a:p>
+            <a:pPr algn="l">
+              <a:lnSpc>
+                <a:spcPct val="130000"/>
+              </a:lnSpc>
+              <a:spcAft>
+                <a:spcPts val="880"/>
+              </a:spcAft>
+            </a:pPr>
+            <a:r>
+              <a:rPr sz="880" b="0">
+                <a:solidFill>
+                  <a:srgbClr val="14213D"/>
+                </a:solidFill>
+                <a:latin typeface="Microsoft JhengHei"/>
+                <a:ea typeface="Microsoft JhengHei"/>
+                <a:cs typeface="Microsoft JhengHei"/>
+              </a:rPr>
+              <a:t>■ </a:t>
+            </a:r>
+            <a:r>
+              <a:rPr sz="1600" b="0">
+                <a:solidFill>
+                  <a:srgbClr val="3B4763"/>
+                </a:solidFill>
+                <a:latin typeface="Microsoft JhengHei"/>
+                <a:ea typeface="Microsoft JhengHei"/>
+                <a:cs typeface="Microsoft JhengHei"/>
+              </a:rPr>
+              <a:t>累計成交 83 筆、交易過 13 檔標的</a:t>
             </a:r>
           </a:p>
         </p:txBody>
@@ -20845,7 +21511,7 @@
                 <a:ea typeface="Microsoft JhengHei"/>
                 <a:cs typeface="Microsoft JhengHei"/>
               </a:rPr>
-              <a:t>-14.01%</a:t>
+              <a:t>-12.51%</a:t>
             </a:r>
           </a:p>
         </p:txBody>
@@ -20927,7 +21593,7 @@
                 <a:ea typeface="Microsoft JhengHei"/>
                 <a:cs typeface="Microsoft JhengHei"/>
               </a:rPr>
-              <a:t>-4.75%</a:t>
+              <a:t>-4.47%</a:t>
             </a:r>
           </a:p>
         </p:txBody>
@@ -21009,7 +21675,7 @@
                 <a:ea typeface="Microsoft JhengHei"/>
                 <a:cs typeface="Microsoft JhengHei"/>
               </a:rPr>
-              <a:t>-14.19%</a:t>
+              <a:t>-12.69%</a:t>
             </a:r>
           </a:p>
         </p:txBody>
@@ -21091,7 +21757,7 @@
                 <a:ea typeface="Microsoft JhengHei"/>
                 <a:cs typeface="Microsoft JhengHei"/>
               </a:rPr>
-              <a:t>104.2%</a:t>
+              <a:t>100.4%</a:t>
             </a:r>
           </a:p>
         </p:txBody>
@@ -21296,7 +21962,7 @@
                 <a:ea typeface="Microsoft JhengHei"/>
                 <a:cs typeface="Microsoft JhengHei"/>
               </a:rPr>
-              <a:t>2026 德明X富達投資擂台｜第 2 週週報｜2026-10-12～2026-10-15</a:t>
+              <a:t>2026 德明X富達投資擂台｜第 2 週週報｜2026-10-12～2026-10-16</a:t>
             </a:r>
           </a:p>
         </p:txBody>
@@ -22206,15 +22872,15 @@
               </a:lnSpc>
             </a:pPr>
             <a:r>
-              <a:rPr sz="1300" b="0">
-                <a:solidFill>
-                  <a:srgbClr val="6B7489"/>
-                </a:solidFill>
-                <a:latin typeface="Microsoft JhengHei"/>
-                <a:ea typeface="Microsoft JhengHei"/>
-                <a:cs typeface="Microsoft JhengHei"/>
-              </a:rPr>
-              <a:t>盤中</a:t>
+              <a:rPr sz="1700" b="1">
+                <a:solidFill>
+                  <a:srgbClr val="C8323A"/>
+                </a:solidFill>
+                <a:latin typeface="Bahnschrift"/>
+                <a:ea typeface="Microsoft JhengHei"/>
+                <a:cs typeface="Microsoft JhengHei"/>
+              </a:rPr>
+              <a:t>+0.30%</a:t>
             </a:r>
           </a:p>
         </p:txBody>
@@ -22410,7 +23076,7 @@
                 <a:ea typeface="Microsoft JhengHei"/>
                 <a:cs typeface="Microsoft JhengHei"/>
               </a:rPr>
-              <a:t>週一：大盤跌0.02%，中歐就混動車貿易達成諒解，台積電將公布第三季財報。</a:t>
+              <a:t>週一：加權 -0.02%；中歐就混動車貿易達成諒解，有望避免加徵關稅。</a:t>
             </a:r>
           </a:p>
           <a:p>
@@ -22442,7 +23108,7 @@
                 <a:ea typeface="Microsoft JhengHei"/>
                 <a:cs typeface="Microsoft JhengHei"/>
               </a:rPr>
-              <a:t>週二：大盤跌1.95%，南亞科第3季稅後純益大幅成長，台積電ADR跌1.98%。</a:t>
+              <a:t>週二：加權 -1.95%；南亞科第3季稅後純益876.27億元，季增74.6%、年增55倍，每股純益25.4元；累計前三季稅後純益1637.77億元，每股純益49.28元。</a:t>
             </a:r>
           </a:p>
           <a:p>
@@ -22474,7 +23140,7 @@
                 <a:ea typeface="Microsoft JhengHei"/>
                 <a:cs typeface="Microsoft JhengHei"/>
               </a:rPr>
-              <a:t>週三：大盤漲0.59%，外資單日賣超台股1653億元創史上第三大，國家隊進場護盤。</a:t>
+              <a:t>週三：加權 +0.59%；外資單日賣超台股1653億元創史上第三大，台股盤中重挫逾千點、終場跌960點失守4.9萬點，台幣爆量重貶1.9角貶破32元</a:t>
             </a:r>
           </a:p>
           <a:p>
@@ -22506,7 +23172,39 @@
                 <a:ea typeface="Microsoft JhengHei"/>
                 <a:cs typeface="Microsoft JhengHei"/>
               </a:rPr>
-              <a:t>週四：大盤跌3.41%，台股恐失守4萬8點，台指期夜盤崩853點。</a:t>
+              <a:t>週四：加權 -3.41%；台股今恐失守4萬8</a:t>
+            </a:r>
+          </a:p>
+          <a:p>
+            <a:pPr algn="l">
+              <a:lnSpc>
+                <a:spcPct val="130000"/>
+              </a:lnSpc>
+              <a:spcAft>
+                <a:spcPts val="715"/>
+              </a:spcAft>
+            </a:pPr>
+            <a:r>
+              <a:rPr sz="715" b="0">
+                <a:solidFill>
+                  <a:srgbClr val="14213D"/>
+                </a:solidFill>
+                <a:latin typeface="Microsoft JhengHei"/>
+                <a:ea typeface="Microsoft JhengHei"/>
+                <a:cs typeface="Microsoft JhengHei"/>
+              </a:rPr>
+              <a:t>■ </a:t>
+            </a:r>
+            <a:r>
+              <a:rPr sz="1300" b="0">
+                <a:solidFill>
+                  <a:srgbClr val="3B4763"/>
+                </a:solidFill>
+                <a:latin typeface="Microsoft JhengHei"/>
+                <a:ea typeface="Microsoft JhengHei"/>
+                <a:cs typeface="Microsoft JhengHei"/>
+              </a:rPr>
+              <a:t>週五：加權 +0.30%；台股重挫1655點失守47K大關，外資單日賣超3025.55億元創歷史新高</a:t>
             </a:r>
           </a:p>
         </p:txBody>
@@ -22547,7 +23245,7 @@
                 <a:ea typeface="Microsoft JhengHei"/>
                 <a:cs typeface="Microsoft JhengHei"/>
               </a:rPr>
-              <a:t>2026 德明X富達投資擂台｜第 2 週週報｜2026-10-12～2026-10-15</a:t>
+              <a:t>2026 德明X富達投資擂台｜第 2 週週報｜2026-10-12～2026-10-16</a:t>
             </a:r>
           </a:p>
         </p:txBody>
@@ -23457,15 +24155,15 @@
               </a:lnSpc>
             </a:pPr>
             <a:r>
-              <a:rPr sz="1300" b="0">
-                <a:solidFill>
-                  <a:srgbClr val="6B7489"/>
-                </a:solidFill>
-                <a:latin typeface="Microsoft JhengHei"/>
-                <a:ea typeface="Microsoft JhengHei"/>
-                <a:cs typeface="Microsoft JhengHei"/>
-              </a:rPr>
-              <a:t>盤中</a:t>
+              <a:rPr sz="1700" b="1">
+                <a:solidFill>
+                  <a:srgbClr val="C8323A"/>
+                </a:solidFill>
+                <a:latin typeface="Bahnschrift"/>
+                <a:ea typeface="Microsoft JhengHei"/>
+                <a:cs typeface="Microsoft JhengHei"/>
+              </a:rPr>
+              <a:t>+0.30%</a:t>
             </a:r>
           </a:p>
         </p:txBody>
@@ -26314,7 +27012,7 @@
                 <a:ea typeface="Microsoft JhengHei"/>
                 <a:cs typeface="Microsoft JhengHei"/>
               </a:rPr>
-              <a:t>2026 德明X富達投資擂台｜第 2 週週報｜2026-10-12～2026-10-15</a:t>
+              <a:t>2026 德明X富達投資擂台｜第 2 週週報｜2026-10-12～2026-10-16</a:t>
             </a:r>
           </a:p>
         </p:txBody>
@@ -27226,15 +27924,15 @@
               </a:lnSpc>
             </a:pPr>
             <a:r>
-              <a:rPr sz="1300" b="0">
-                <a:solidFill>
-                  <a:srgbClr val="6B7489"/>
-                </a:solidFill>
-                <a:latin typeface="Microsoft JhengHei"/>
-                <a:ea typeface="Microsoft JhengHei"/>
-                <a:cs typeface="Microsoft JhengHei"/>
-              </a:rPr>
-              <a:t>盤中</a:t>
+              <a:rPr sz="1700" b="1">
+                <a:solidFill>
+                  <a:srgbClr val="C8323A"/>
+                </a:solidFill>
+                <a:latin typeface="Bahnschrift"/>
+                <a:ea typeface="Microsoft JhengHei"/>
+                <a:cs typeface="Microsoft JhengHei"/>
+              </a:rPr>
+              <a:t>+0.30%</a:t>
             </a:r>
           </a:p>
         </p:txBody>
@@ -27497,7 +28195,7 @@
                 <a:ea typeface="Microsoft JhengHei"/>
                 <a:cs typeface="Microsoft JhengHei"/>
               </a:rPr>
-              <a:t>風險警示：重大負面新聞：營收大幅下降；先減碼一半，保留部位觀察後續。</a:t>
+              <a:t>風險警示：重大負面新聞：營收大幅下降；先減碼一半，保留部位觀察後續</a:t>
             </a:r>
           </a:p>
           <a:p>
@@ -27932,7 +28630,7 @@
                 <a:ea typeface="Microsoft JhengHei"/>
                 <a:cs typeface="Microsoft JhengHei"/>
               </a:rPr>
-              <a:t>2026 德明X富達投資擂台｜第 2 週週報｜2026-10-12～2026-10-15</a:t>
+              <a:t>2026 德明X富達投資擂台｜第 2 週週報｜2026-10-12～2026-10-16</a:t>
             </a:r>
           </a:p>
         </p:txBody>
@@ -28844,15 +29542,15 @@
               </a:lnSpc>
             </a:pPr>
             <a:r>
-              <a:rPr sz="1300" b="0">
-                <a:solidFill>
-                  <a:srgbClr val="6B7489"/>
-                </a:solidFill>
-                <a:latin typeface="Microsoft JhengHei"/>
-                <a:ea typeface="Microsoft JhengHei"/>
-                <a:cs typeface="Microsoft JhengHei"/>
-              </a:rPr>
-              <a:t>盤中</a:t>
+              <a:rPr sz="1700" b="1">
+                <a:solidFill>
+                  <a:srgbClr val="C8323A"/>
+                </a:solidFill>
+                <a:latin typeface="Bahnschrift"/>
+                <a:ea typeface="Microsoft JhengHei"/>
+                <a:cs typeface="Microsoft JhengHei"/>
+              </a:rPr>
+              <a:t>+0.30%</a:t>
             </a:r>
           </a:p>
         </p:txBody>
@@ -29115,7 +29813,7 @@
                 <a:ea typeface="Microsoft JhengHei"/>
                 <a:cs typeface="Microsoft JhengHei"/>
               </a:rPr>
-              <a:t>進攻籃第 1 段停利：報酬 +11.03% ≥ 10%；同時風險警示：列為處置股（連續三次及當日沖銷標準，115/10/08～115/10/19）：改為分盤撮合、可能需預收款，流動性變差，減碼三分之一。</a:t>
+              <a:t>進攻籃第 1 段停利：報酬 +11.03% ≥ 10%；同時風險警示：列為處置股（連續三次及當日沖銷標準，115/10/08～115/10/19）：改為分盤撮合、可能需預收款，流動性變差，減碼三分之一</a:t>
             </a:r>
           </a:p>
           <a:p>
@@ -29550,7 +30248,7 @@
                 <a:ea typeface="Microsoft JhengHei"/>
                 <a:cs typeface="Microsoft JhengHei"/>
               </a:rPr>
-              <a:t>2026 德明X富達投資擂台｜第 2 週週報｜2026-10-12～2026-10-15</a:t>
+              <a:t>2026 德明X富達投資擂台｜第 2 週週報｜2026-10-12～2026-10-16</a:t>
             </a:r>
           </a:p>
         </p:txBody>
@@ -30462,15 +31160,15 @@
               </a:lnSpc>
             </a:pPr>
             <a:r>
-              <a:rPr sz="1300" b="0">
-                <a:solidFill>
-                  <a:srgbClr val="6B7489"/>
-                </a:solidFill>
-                <a:latin typeface="Microsoft JhengHei"/>
-                <a:ea typeface="Microsoft JhengHei"/>
-                <a:cs typeface="Microsoft JhengHei"/>
-              </a:rPr>
-              <a:t>盤中</a:t>
+              <a:rPr sz="1700" b="1">
+                <a:solidFill>
+                  <a:srgbClr val="C8323A"/>
+                </a:solidFill>
+                <a:latin typeface="Bahnschrift"/>
+                <a:ea typeface="Microsoft JhengHei"/>
+                <a:cs typeface="Microsoft JhengHei"/>
+              </a:rPr>
+              <a:t>+0.30%</a:t>
             </a:r>
           </a:p>
         </p:txBody>
@@ -30733,7 +31431,39 @@
                 <a:ea typeface="Microsoft JhengHei"/>
                 <a:cs typeface="Microsoft JhengHei"/>
               </a:rPr>
-              <a:t>股價站上月線與季線（距季線 +8.8%），近 20 日 +12.2%，順勢加入強勢股；屬半導體業，前一晚費城半導體 -2.67%、輝達 -1.29%，族群受美股拖累開低，趁震盪時分批承接；前一交易日持股率 75.1%，接近 70% 下限，買進拉高持股率保留緩衝；近日已賣出 潤泰全、聯茂，資金轉進半導體業，維持持股檔數分散風險。</a:t>
+              <a:t>股價站上月線與季線（距季線 +8.8%），近 20 日 +12.2%，順勢加入強勢股；屬半導體業，前一晚費城半導體 -2.67%、輝達 -1.29%，族群受美股拖累開低，趁震盪時分批承接</a:t>
+            </a:r>
+          </a:p>
+          <a:p>
+            <a:pPr algn="l">
+              <a:lnSpc>
+                <a:spcPct val="130000"/>
+              </a:lnSpc>
+              <a:spcAft>
+                <a:spcPts val="600"/>
+              </a:spcAft>
+            </a:pPr>
+            <a:r>
+              <a:rPr sz="700" b="0">
+                <a:solidFill>
+                  <a:srgbClr val="14213D"/>
+                </a:solidFill>
+                <a:latin typeface="Microsoft JhengHei"/>
+                <a:ea typeface="Microsoft JhengHei"/>
+                <a:cs typeface="Microsoft JhengHei"/>
+              </a:rPr>
+              <a:t>■ </a:t>
+            </a:r>
+            <a:r>
+              <a:rPr sz="1200" b="0">
+                <a:solidFill>
+                  <a:srgbClr val="3B4763"/>
+                </a:solidFill>
+                <a:latin typeface="Microsoft JhengHei"/>
+                <a:ea typeface="Microsoft JhengHei"/>
+                <a:cs typeface="Microsoft JhengHei"/>
+              </a:rPr>
+              <a:t>前一交易日持股率 75.1%，接近 70% 下限，買進拉高持股率保留緩衝</a:t>
             </a:r>
           </a:p>
           <a:p>
@@ -31086,7 +31816,7 @@
                 <a:ea typeface="Microsoft JhengHei"/>
                 <a:cs typeface="Microsoft JhengHei"/>
               </a:rPr>
-              <a:t>2026 德明X富達投資擂台｜第 2 週週報｜2026-10-12～2026-10-15</a:t>
+              <a:t>2026 德明X富達投資擂台｜第 2 週週報｜2026-10-12～2026-10-16</a:t>
             </a:r>
           </a:p>
         </p:txBody>
@@ -31998,15 +32728,15 @@
               </a:lnSpc>
             </a:pPr>
             <a:r>
-              <a:rPr sz="1300" b="0">
-                <a:solidFill>
-                  <a:srgbClr val="6B7489"/>
-                </a:solidFill>
-                <a:latin typeface="Microsoft JhengHei"/>
-                <a:ea typeface="Microsoft JhengHei"/>
-                <a:cs typeface="Microsoft JhengHei"/>
-              </a:rPr>
-              <a:t>盤中</a:t>
+              <a:rPr sz="1700" b="1">
+                <a:solidFill>
+                  <a:srgbClr val="C8323A"/>
+                </a:solidFill>
+                <a:latin typeface="Bahnschrift"/>
+                <a:ea typeface="Microsoft JhengHei"/>
+                <a:cs typeface="Microsoft JhengHei"/>
+              </a:rPr>
+              <a:t>+0.30%</a:t>
             </a:r>
           </a:p>
         </p:txBody>
@@ -32704,7 +33434,7 @@
                 <a:ea typeface="Microsoft JhengHei"/>
                 <a:cs typeface="Microsoft JhengHei"/>
               </a:rPr>
-              <a:t>2026 德明X富達投資擂台｜第 2 週週報｜2026-10-12～2026-10-15</a:t>
+              <a:t>2026 德明X富達投資擂台｜第 2 週週報｜2026-10-12～2026-10-16</a:t>
             </a:r>
           </a:p>
         </p:txBody>
@@ -33616,15 +34346,15 @@
               </a:lnSpc>
             </a:pPr>
             <a:r>
-              <a:rPr sz="1300" b="0">
-                <a:solidFill>
-                  <a:srgbClr val="6B7489"/>
-                </a:solidFill>
-                <a:latin typeface="Microsoft JhengHei"/>
-                <a:ea typeface="Microsoft JhengHei"/>
-                <a:cs typeface="Microsoft JhengHei"/>
-              </a:rPr>
-              <a:t>盤中</a:t>
+              <a:rPr sz="1700" b="1">
+                <a:solidFill>
+                  <a:srgbClr val="C8323A"/>
+                </a:solidFill>
+                <a:latin typeface="Bahnschrift"/>
+                <a:ea typeface="Microsoft JhengHei"/>
+                <a:cs typeface="Microsoft JhengHei"/>
+              </a:rPr>
+              <a:t>+0.30%</a:t>
             </a:r>
           </a:p>
         </p:txBody>
@@ -33887,7 +34617,39 @@
                 <a:ea typeface="Microsoft JhengHei"/>
                 <a:cs typeface="Microsoft JhengHei"/>
               </a:rPr>
-              <a:t>系統進攻籃候選第 8 名，模型預期一個月超額報酬 +10.7%，月營收年增 +65%；當天未排進下單清單，自行判斷提前布局；股價站上月線與季線（距季線 +23.7%），近 20 日 +26.4%，順勢加入強勢股；屬電子零組件業，前一晚費城半導體 -2.67%、輝達 -1.29%，族群受美股拖累開低，趁震盪時分批承接；前一交易日持股率 75.1%，接近 70% 下限，買進拉高持股率保留緩衝。</a:t>
+              <a:t>系統進攻籃候選第 8 名，模型預期一個月超額報酬 +10.7%，月營收年增 +65%；當天未排進下單清單，自行判斷提前布局；股價站上月線與季線（距季線 +23.7%），近 20 日 +26.4%，順勢加入強勢股</a:t>
+            </a:r>
+          </a:p>
+          <a:p>
+            <a:pPr algn="l">
+              <a:lnSpc>
+                <a:spcPct val="130000"/>
+              </a:lnSpc>
+              <a:spcAft>
+                <a:spcPts val="600"/>
+              </a:spcAft>
+            </a:pPr>
+            <a:r>
+              <a:rPr sz="700" b="0">
+                <a:solidFill>
+                  <a:srgbClr val="14213D"/>
+                </a:solidFill>
+                <a:latin typeface="Microsoft JhengHei"/>
+                <a:ea typeface="Microsoft JhengHei"/>
+                <a:cs typeface="Microsoft JhengHei"/>
+              </a:rPr>
+              <a:t>■ </a:t>
+            </a:r>
+            <a:r>
+              <a:rPr sz="1200" b="0">
+                <a:solidFill>
+                  <a:srgbClr val="3B4763"/>
+                </a:solidFill>
+                <a:latin typeface="Microsoft JhengHei"/>
+                <a:ea typeface="Microsoft JhengHei"/>
+                <a:cs typeface="Microsoft JhengHei"/>
+              </a:rPr>
+              <a:t>屬電子零組件業，前一晚費城半導體 -2.67%、輝達 -1.29%，族群受美股拖累開低，趁震盪時分批承接</a:t>
             </a:r>
           </a:p>
           <a:p>
@@ -34240,7 +35002,7 @@
                 <a:ea typeface="Microsoft JhengHei"/>
                 <a:cs typeface="Microsoft JhengHei"/>
               </a:rPr>
-              <a:t>2026 德明X富達投資擂台｜第 2 週週報｜2026-10-12～2026-10-15</a:t>
+              <a:t>2026 德明X富達投資擂台｜第 2 週週報｜2026-10-12～2026-10-16</a:t>
             </a:r>
           </a:p>
         </p:txBody>
